--- a/docs/pitch/Responders_Academy_MISIS-MR.DRUN.pptx
+++ b/docs/pitch/Responders_Academy_MISIS-MR.DRUN.pptx
@@ -36795,7 +36795,7 @@
                   <a:schemeClr val="tx1"/>
                 </a:solidFill>
               </a:rPr>
-              <a:t>[роль]</a:t>
+              <a:t>Backend и ML engineer</a:t>
             </a:r>
           </a:p>
           <a:p>
@@ -36812,7 +36812,7 @@
                   <a:schemeClr val="tx1"/>
                 </a:solidFill>
               </a:rPr>
-              <a:t>[ник]</a:t>
+              <a:t>@sbnmklop</a:t>
             </a:r>
           </a:p>
           <a:p>
@@ -36829,7 +36829,7 @@
                   <a:schemeClr val="tx1"/>
                 </a:solidFill>
               </a:rPr>
-              <a:t>+7 985 511-39-58</a:t>
+              <a:t>+7 917 274-75-17</a:t>
             </a:r>
           </a:p>
           <a:p>
@@ -36846,7 +36846,7 @@
                   <a:schemeClr val="tx1"/>
                 </a:solidFill>
               </a:rPr>
-              <a:t>[учёба]</a:t>
+              <a:t>НИТУ МИСИС</a:t>
             </a:r>
           </a:p>
         </p:txBody>
@@ -37068,7 +37068,7 @@
                   <a:schemeClr val="accent5"/>
                 </a:solidFill>
               </a:rPr>
-              <a:t>Никита [фамилия]</a:t>
+              <a:t>Хасянов Амир</a:t>
             </a:r>
           </a:p>
         </p:txBody>
@@ -37354,7 +37354,7 @@
                   <a:schemeClr val="tx1"/>
                 </a:solidFill>
               </a:rPr>
-              <a:t>[роль]</a:t>
+              <a:t>Full stack и аналитик</a:t>
             </a:r>
           </a:p>
           <a:p>
@@ -37371,7 +37371,7 @@
                   <a:schemeClr val="tx1"/>
                 </a:solidFill>
               </a:rPr>
-              <a:t>[ник]</a:t>
+              <a:t>@aleksander8_0</a:t>
             </a:r>
           </a:p>
           <a:p>
@@ -37388,7 +37388,7 @@
                   <a:schemeClr val="tx1"/>
                 </a:solidFill>
               </a:rPr>
-              <a:t>[телефон]</a:t>
+              <a:t>+7 960 300-02-16</a:t>
             </a:r>
           </a:p>
           <a:p>
@@ -37405,7 +37405,7 @@
                   <a:schemeClr val="tx1"/>
                 </a:solidFill>
               </a:rPr>
-              <a:t>[учёба]</a:t>
+              <a:t>Физтех-лицей им. П. Л. Капицы</a:t>
             </a:r>
           </a:p>
         </p:txBody>
@@ -37627,7 +37627,7 @@
                   <a:schemeClr val="accent5"/>
                 </a:solidFill>
               </a:rPr>
-              <a:t>[Имя Фамилия]</a:t>
+              <a:t>Янеев Александр</a:t>
             </a:r>
           </a:p>
         </p:txBody>
@@ -37913,7 +37913,7 @@
                   <a:schemeClr val="tx1"/>
                 </a:solidFill>
               </a:rPr>
-              <a:t>[роль]</a:t>
+              <a:t>Full stack и дизайнер</a:t>
             </a:r>
           </a:p>
           <a:p>
@@ -37930,7 +37930,7 @@
                   <a:schemeClr val="tx1"/>
                 </a:solidFill>
               </a:rPr>
-              <a:t>[ник]</a:t>
+              <a:t>@EeyuhVVV</a:t>
             </a:r>
           </a:p>
           <a:p>
@@ -37947,7 +37947,7 @@
                   <a:schemeClr val="tx1"/>
                 </a:solidFill>
               </a:rPr>
-              <a:t>[телефон]</a:t>
+              <a:t>+7 952 024-20-62</a:t>
             </a:r>
           </a:p>
           <a:p>
@@ -37964,7 +37964,7 @@
                   <a:schemeClr val="tx1"/>
                 </a:solidFill>
               </a:rPr>
-              <a:t>[учёба]</a:t>
+              <a:t>НИТУ МИСИС</a:t>
             </a:r>
           </a:p>
         </p:txBody>
@@ -38186,7 +38186,7 @@
                   <a:schemeClr val="accent5"/>
                 </a:solidFill>
               </a:rPr>
-              <a:t>[Имя Фамилия]</a:t>
+              <a:t>Яров Иван</a:t>
             </a:r>
           </a:p>
         </p:txBody>
@@ -38472,7 +38472,7 @@
                   <a:schemeClr val="tx1"/>
                 </a:solidFill>
               </a:rPr>
-              <a:t>[роль]</a:t>
+              <a:t>Frontend и дизайнер</a:t>
             </a:r>
           </a:p>
           <a:p>
@@ -38489,7 +38489,7 @@
                   <a:schemeClr val="tx1"/>
                 </a:solidFill>
               </a:rPr>
-              <a:t>[ник]</a:t>
+              <a:t>@mr_melov</a:t>
             </a:r>
           </a:p>
           <a:p>
@@ -38506,7 +38506,7 @@
                   <a:schemeClr val="tx1"/>
                 </a:solidFill>
               </a:rPr>
-              <a:t>[телефон]</a:t>
+              <a:t>+7 985 511-39-58</a:t>
             </a:r>
           </a:p>
           <a:p>
@@ -38523,7 +38523,7 @@
                   <a:schemeClr val="tx1"/>
                 </a:solidFill>
               </a:rPr>
-              <a:t>[учёба]</a:t>
+              <a:t>НИТУ МИСИС</a:t>
             </a:r>
           </a:p>
         </p:txBody>
@@ -38745,7 +38745,7 @@
                   <a:schemeClr val="accent5"/>
                 </a:solidFill>
               </a:rPr>
-              <a:t>[Имя Фамилия]</a:t>
+              <a:t>Ткаченко Никита</a:t>
             </a:r>
           </a:p>
         </p:txBody>
@@ -38906,124 +38906,6 @@
       </p:sp>
       <p:sp>
         <p:nvSpPr>
-          <p:cNvPr id="2" name="Рисунок 1">
-            <a:extLst>
-              <a:ext uri="{FF2B5EF4-FFF2-40B4-BE49-F238E27FC236}">
-                <a16:creationId xmlns:a16="http://schemas.microsoft.com/office/drawing/2014/main" id="{4C94D4FF-301C-477D-8018-73C5CC99D493}"/>
-              </a:ext>
-              <a:ext uri="{C183D7F6-B498-43B3-948B-1728B52AA6E4}">
-                <adec:decorative xmlns:adec="http://schemas.microsoft.com/office/drawing/2017/decorative" val="1"/>
-              </a:ext>
-            </a:extLst>
-          </p:cNvPr>
-          <p:cNvSpPr>
-            <a:spLocks noGrp="1"/>
-          </p:cNvSpPr>
-          <p:nvPr>
-            <p:ph type="pic" sz="quarter" idx="4294967295"/>
-          </p:nvPr>
-        </p:nvSpPr>
-        <p:spPr>
-          <a:xfrm>
-            <a:off x="581397" y="1816054"/>
-            <a:ext cx="1722566" cy="1552901"/>
-          </a:xfrm>
-        </p:spPr>
-      </p:sp>
-      <p:sp>
-        <p:nvSpPr>
-          <p:cNvPr id="3" name="Рисунок 2">
-            <a:extLst>
-              <a:ext uri="{FF2B5EF4-FFF2-40B4-BE49-F238E27FC236}">
-                <a16:creationId xmlns:a16="http://schemas.microsoft.com/office/drawing/2014/main" id="{855F75D9-2AE8-476E-3BFF-E3DD59A60081}"/>
-              </a:ext>
-            </a:extLst>
-          </p:cNvPr>
-          <p:cNvSpPr>
-            <a:spLocks noGrp="1"/>
-          </p:cNvSpPr>
-          <p:nvPr>
-            <p:ph type="pic" sz="quarter" idx="4294967295"/>
-          </p:nvPr>
-        </p:nvSpPr>
-        <p:spPr>
-          <a:xfrm>
-            <a:off x="2886467" y="1826554"/>
-            <a:ext cx="1722566" cy="1542401"/>
-          </a:xfrm>
-        </p:spPr>
-      </p:sp>
-      <p:sp>
-        <p:nvSpPr>
-          <p:cNvPr id="4" name="Рисунок 3">
-            <a:extLst>
-              <a:ext uri="{FF2B5EF4-FFF2-40B4-BE49-F238E27FC236}">
-                <a16:creationId xmlns:a16="http://schemas.microsoft.com/office/drawing/2014/main" id="{767E99FD-70C0-A2B6-EA8E-C07EBA0B37E0}"/>
-              </a:ext>
-            </a:extLst>
-          </p:cNvPr>
-          <p:cNvSpPr>
-            <a:spLocks noGrp="1"/>
-          </p:cNvSpPr>
-          <p:nvPr>
-            <p:ph type="pic" sz="quarter" idx="4294967295"/>
-          </p:nvPr>
-        </p:nvSpPr>
-        <p:spPr>
-          <a:xfrm>
-            <a:off x="5191784" y="1809238"/>
-            <a:ext cx="1722567" cy="1559717"/>
-          </a:xfrm>
-        </p:spPr>
-      </p:sp>
-      <p:sp>
-        <p:nvSpPr>
-          <p:cNvPr id="5" name="Рисунок 4">
-            <a:extLst>
-              <a:ext uri="{FF2B5EF4-FFF2-40B4-BE49-F238E27FC236}">
-                <a16:creationId xmlns:a16="http://schemas.microsoft.com/office/drawing/2014/main" id="{D6C4749F-7C67-9CD8-7C7C-023BB23DC622}"/>
-              </a:ext>
-            </a:extLst>
-          </p:cNvPr>
-          <p:cNvSpPr>
-            <a:spLocks noGrp="1"/>
-          </p:cNvSpPr>
-          <p:nvPr>
-            <p:ph type="pic" sz="quarter" idx="4294967295"/>
-          </p:nvPr>
-        </p:nvSpPr>
-        <p:spPr>
-          <a:xfrm>
-            <a:off x="7520208" y="1809238"/>
-            <a:ext cx="1722567" cy="1559717"/>
-          </a:xfrm>
-        </p:spPr>
-      </p:sp>
-      <p:sp>
-        <p:nvSpPr>
-          <p:cNvPr id="6" name="Рисунок 5">
-            <a:extLst>
-              <a:ext uri="{FF2B5EF4-FFF2-40B4-BE49-F238E27FC236}">
-                <a16:creationId xmlns:a16="http://schemas.microsoft.com/office/drawing/2014/main" id="{B1F74E3B-D178-4815-DD0C-A02592AA14E6}"/>
-              </a:ext>
-            </a:extLst>
-          </p:cNvPr>
-          <p:cNvSpPr>
-            <a:spLocks noGrp="1"/>
-          </p:cNvSpPr>
-          <p:nvPr>
-            <p:ph type="pic" sz="quarter" idx="4294967295"/>
-          </p:nvPr>
-        </p:nvSpPr>
-        <p:spPr>
-          <a:xfrm>
-            <a:off x="9802422" y="1809238"/>
-            <a:ext cx="1722566" cy="1559717"/>
-          </a:xfrm>
-        </p:spPr>
-      </p:sp>
-      <p:sp>
-        <p:nvSpPr>
           <p:cNvPr id="7" name="Заголовок 6">
             <a:extLst>
               <a:ext uri="{FF2B5EF4-FFF2-40B4-BE49-F238E27FC236}">
@@ -39139,7 +39021,7 @@
                   <a:schemeClr val="tx1"/>
                 </a:solidFill>
               </a:rPr>
-              <a:t>8 953 012-20-88</a:t>
+              <a:t>+7 953 012-20-88</a:t>
             </a:r>
           </a:p>
           <a:p>
@@ -39386,6 +39268,126 @@
           </a:p>
         </p:txBody>
       </p:sp>
+      <p:pic>
+        <p:nvPicPr>
+          <p:cNvPr id="68" name="Picture 67" descr="photo1.jpg"/>
+          <p:cNvPicPr>
+            <a:picLocks noChangeAspect="1"/>
+          </p:cNvPicPr>
+          <p:nvPr/>
+        </p:nvPicPr>
+        <p:blipFill>
+          <a:blip r:embed="rId4"/>
+          <a:stretch>
+            <a:fillRect/>
+          </a:stretch>
+        </p:blipFill>
+        <p:spPr>
+          <a:xfrm>
+            <a:off x="581397" y="1816054"/>
+            <a:ext cx="1722566" cy="1552901"/>
+          </a:xfrm>
+          <a:prstGeom prst="rect">
+            <a:avLst/>
+          </a:prstGeom>
+        </p:spPr>
+      </p:pic>
+      <p:pic>
+        <p:nvPicPr>
+          <p:cNvPr id="69" name="Picture 68" descr="photo2.jpg"/>
+          <p:cNvPicPr>
+            <a:picLocks noChangeAspect="1"/>
+          </p:cNvPicPr>
+          <p:nvPr/>
+        </p:nvPicPr>
+        <p:blipFill>
+          <a:blip r:embed="rId5"/>
+          <a:stretch>
+            <a:fillRect/>
+          </a:stretch>
+        </p:blipFill>
+        <p:spPr>
+          <a:xfrm>
+            <a:off x="2886467" y="1826554"/>
+            <a:ext cx="1722566" cy="1542401"/>
+          </a:xfrm>
+          <a:prstGeom prst="rect">
+            <a:avLst/>
+          </a:prstGeom>
+        </p:spPr>
+      </p:pic>
+      <p:pic>
+        <p:nvPicPr>
+          <p:cNvPr id="70" name="Picture 69" descr="photo3.jpg"/>
+          <p:cNvPicPr>
+            <a:picLocks noChangeAspect="1"/>
+          </p:cNvPicPr>
+          <p:nvPr/>
+        </p:nvPicPr>
+        <p:blipFill>
+          <a:blip r:embed="rId6"/>
+          <a:stretch>
+            <a:fillRect/>
+          </a:stretch>
+        </p:blipFill>
+        <p:spPr>
+          <a:xfrm>
+            <a:off x="5191784" y="1809238"/>
+            <a:ext cx="1722567" cy="1559717"/>
+          </a:xfrm>
+          <a:prstGeom prst="rect">
+            <a:avLst/>
+          </a:prstGeom>
+        </p:spPr>
+      </p:pic>
+      <p:pic>
+        <p:nvPicPr>
+          <p:cNvPr id="71" name="Picture 70" descr="photo4.jpg"/>
+          <p:cNvPicPr>
+            <a:picLocks noChangeAspect="1"/>
+          </p:cNvPicPr>
+          <p:nvPr/>
+        </p:nvPicPr>
+        <p:blipFill>
+          <a:blip r:embed="rId7"/>
+          <a:stretch>
+            <a:fillRect/>
+          </a:stretch>
+        </p:blipFill>
+        <p:spPr>
+          <a:xfrm>
+            <a:off x="7520208" y="1809238"/>
+            <a:ext cx="1722567" cy="1559717"/>
+          </a:xfrm>
+          <a:prstGeom prst="rect">
+            <a:avLst/>
+          </a:prstGeom>
+        </p:spPr>
+      </p:pic>
+      <p:pic>
+        <p:nvPicPr>
+          <p:cNvPr id="72" name="Picture 71" descr="photo5.jpg"/>
+          <p:cNvPicPr>
+            <a:picLocks noChangeAspect="1"/>
+          </p:cNvPicPr>
+          <p:nvPr/>
+        </p:nvPicPr>
+        <p:blipFill>
+          <a:blip r:embed="rId8"/>
+          <a:stretch>
+            <a:fillRect/>
+          </a:stretch>
+        </p:blipFill>
+        <p:spPr>
+          <a:xfrm>
+            <a:off x="9802422" y="1809238"/>
+            <a:ext cx="1722566" cy="1559717"/>
+          </a:xfrm>
+          <a:prstGeom prst="rect">
+            <a:avLst/>
+          </a:prstGeom>
+        </p:spPr>
+      </p:pic>
     </p:spTree>
     <p:extLst>
       <p:ext uri="{BB962C8B-B14F-4D97-AF65-F5344CB8AC3E}">
